--- a/public/downloads/three-kingdoms/lesson-02-teaching.pptx
+++ b/public/downloads/three-kingdoms/lesson-02-teaching.pptx
@@ -14290,7 +14290,7 @@
                 </a:solidFill>
                 <a:latin typeface="S-Core Dream"/>
               </a:rPr>
-              <a:t>웹앱 접속 안내</a:t>
+              <a:t>활동 화면 여는 방법</a:t>
             </a:r>
           </a:p>
         </p:txBody>
@@ -14652,7 +14652,7 @@
                 </a:solidFill>
                 <a:latin typeface="S-Core Dream"/>
               </a:rPr>
-              <a:t>웹앱은 내 판단만 저장하고 정답·점수는 보여 주지 않습니다.</a:t>
+              <a:t>이 화면은 내 판단만 저장하고 정답·점수는 보여 주지 않습니다.</a:t>
             </a:r>
           </a:p>
         </p:txBody>
@@ -14733,7 +14733,7 @@
                 </a:solidFill>
                 <a:latin typeface="S-Core Dream"/>
               </a:rPr>
-              <a:t>종이 활동지와 웹앱의 문장 번호는 똑같습니다.</a:t>
+              <a:t>종이 활동지와 화면의 문장 번호는 똑같습니다.</a:t>
             </a:r>
           </a:p>
         </p:txBody>
